--- a/dist/초1/국어/한글/초1_국어_한글_03_받침없는글자.pptx
+++ b/dist/초1/국어/한글/초1_국어_한글_03_받침없는글자.pptx
@@ -120,20 +120,20 @@
   <p:extLst>
     <p:ext uri="{521415D9-36F7-43E2-AB2F-B90AF26B5E84}">
       <p14:sectionLst xmlns:p14="http://schemas.microsoft.com/office/powerpoint/2010/main">
-        <p14:section name="도입" id="{28eb243b-fa0c-d2e9-9b8f-8f92d5b37bd8}">
+        <p14:section name="도입" id="{fce57ce7-297a-396c-023e-1723ac33a81d}">
           <p14:sldIdLst>
             <p14:sldId id="256"/>
             <p14:sldId id="257"/>
           </p14:sldIdLst>
         </p14:section>
-        <p14:section name="개념" id="{1a55c5b3-b2c3-ee88-3b3d-d1840d48ad41}">
+        <p14:section name="개념" id="{65f0fd08-ab7b-03e6-ef50-92657da0a3df}">
           <p14:sldIdLst>
             <p14:sldId id="258"/>
             <p14:sldId id="259"/>
             <p14:sldId id="260"/>
           </p14:sldIdLst>
         </p14:section>
-        <p14:section name="연습" id="{69c18545-35f0-1df9-abcd-a6887585dc28}">
+        <p14:section name="연습" id="{32c3d3dc-6a21-f41e-7e06-ed7bf2b1dbf6}">
           <p14:sldIdLst>
             <p14:sldId id="261"/>
             <p14:sldId id="262"/>
@@ -141,19 +141,19 @@
             <p14:sldId id="264"/>
           </p14:sldIdLst>
         </p14:section>
-        <p14:section name="확인" id="{3e38e739-5953-23d7-839e-f84551893b85}">
+        <p14:section name="확인" id="{28502a49-a5fc-5f75-fc5c-8d9964fc67ff}">
           <p14:sldIdLst>
             <p14:sldId id="265"/>
             <p14:sldId id="266"/>
             <p14:sldId id="267"/>
           </p14:sldIdLst>
         </p14:section>
-        <p14:section name="정리" id="{3037355c-9c1d-26eb-167b-707e3fd59de3}">
+        <p14:section name="정리" id="{bf6ec34e-ed45-de9c-14a7-059b5f67d9c2}">
           <p14:sldIdLst>
             <p14:sldId id="268"/>
           </p14:sldIdLst>
         </p14:section>
-        <p14:section name="보충" id="{929231d7-a4f1-0f3d-183f-83b8512e3f5e}">
+        <p14:section name="보충" id="{f69f9b1b-5d9f-8e51-5532-a9c3044a57ed}">
           <p14:sldIdLst>
             <p14:sldId id="269"/>
           </p14:sldIdLst>
@@ -3006,12 +3006,12 @@
         </p:nvSpPr>
         <p:spPr>
           <a:xfrm>
-            <a:off x="7680960" y="1514856"/>
-            <a:ext cx="1176528" cy="1176528"/>
+            <a:off x="7936992" y="1600200"/>
+            <a:ext cx="1005840" cy="1005840"/>
           </a:xfrm>
           <a:prstGeom prst="roundRect">
             <a:avLst>
-              <a:gd name="adj" fmla="val 10881"/>
+              <a:gd name="adj" fmla="val 12727"/>
             </a:avLst>
           </a:prstGeom>
           <a:solidFill>
@@ -3031,7 +3031,7 @@
               <a:buNone/>
             </a:pPr>
             <a:r>
-              <a:rPr lang="ko-KR" altLang="en-US" sz="5100" b="1" dirty="0">
+              <a:rPr lang="ko-KR" altLang="en-US" sz="4400" b="1" dirty="0">
                 <a:solidFill>
                   <a:srgbClr val="1F2937"/>
                 </a:solidFill>
@@ -3041,7 +3041,7 @@
               </a:rPr>
               <a:t>ㄱ</a:t>
             </a:r>
-            <a:endParaRPr lang="ko-KR" sz="5100" dirty="0"/>
+            <a:endParaRPr lang="ko-KR" sz="4400" dirty="0"/>
           </a:p>
         </p:txBody>
       </p:sp>
@@ -3053,12 +3053,12 @@
         </p:nvSpPr>
         <p:spPr>
           <a:xfrm>
-            <a:off x="9058656" y="1514856"/>
-            <a:ext cx="1176528" cy="1176528"/>
+            <a:off x="9144000" y="1600200"/>
+            <a:ext cx="1005840" cy="1005840"/>
           </a:xfrm>
           <a:prstGeom prst="roundRect">
             <a:avLst>
-              <a:gd name="adj" fmla="val 10881"/>
+              <a:gd name="adj" fmla="val 12727"/>
             </a:avLst>
           </a:prstGeom>
           <a:solidFill>
@@ -3078,7 +3078,7 @@
               <a:buNone/>
             </a:pPr>
             <a:r>
-              <a:rPr lang="ko-KR" altLang="en-US" sz="5100" b="1" dirty="0">
+              <a:rPr lang="ko-KR" altLang="en-US" sz="4400" b="1" dirty="0">
                 <a:solidFill>
                   <a:srgbClr val="1F2937"/>
                 </a:solidFill>
@@ -3088,7 +3088,7 @@
               </a:rPr>
               <a:t>ㅏ</a:t>
             </a:r>
-            <a:endParaRPr lang="ko-KR" sz="5100" dirty="0"/>
+            <a:endParaRPr lang="ko-KR" sz="4400" dirty="0"/>
           </a:p>
         </p:txBody>
       </p:sp>
@@ -3100,12 +3100,12 @@
         </p:nvSpPr>
         <p:spPr>
           <a:xfrm>
-            <a:off x="10436352" y="1514856"/>
-            <a:ext cx="1176528" cy="1176528"/>
+            <a:off x="10351008" y="1600200"/>
+            <a:ext cx="1005840" cy="1005840"/>
           </a:xfrm>
           <a:prstGeom prst="roundRect">
             <a:avLst>
-              <a:gd name="adj" fmla="val 10881"/>
+              <a:gd name="adj" fmla="val 12727"/>
             </a:avLst>
           </a:prstGeom>
           <a:solidFill>
@@ -3125,7 +3125,7 @@
               <a:buNone/>
             </a:pPr>
             <a:r>
-              <a:rPr lang="ko-KR" altLang="en-US" sz="5100" b="1" dirty="0">
+              <a:rPr lang="ko-KR" altLang="en-US" sz="4400" b="1" dirty="0">
                 <a:solidFill>
                   <a:srgbClr val="1F2937"/>
                 </a:solidFill>
@@ -3135,7 +3135,7 @@
               </a:rPr>
               <a:t>가</a:t>
             </a:r>
-            <a:endParaRPr lang="ko-KR" sz="5100" dirty="0"/>
+            <a:endParaRPr lang="ko-KR" sz="4400" dirty="0"/>
           </a:p>
         </p:txBody>
       </p:sp>

--- a/dist/초1/국어/한글/초1_국어_한글_03_받침없는글자.pptx
+++ b/dist/초1/국어/한글/초1_국어_한글_03_받침없는글자.pptx
@@ -120,20 +120,20 @@
   <p:extLst>
     <p:ext uri="{521415D9-36F7-43E2-AB2F-B90AF26B5E84}">
       <p14:sectionLst xmlns:p14="http://schemas.microsoft.com/office/powerpoint/2010/main">
-        <p14:section name="도입" id="{fce57ce7-297a-396c-023e-1723ac33a81d}">
+        <p14:section name="도입" id="{9a4fd3fb-f714-6ea6-a29a-669aba204fc0}">
           <p14:sldIdLst>
             <p14:sldId id="256"/>
             <p14:sldId id="257"/>
           </p14:sldIdLst>
         </p14:section>
-        <p14:section name="개념" id="{65f0fd08-ab7b-03e6-ef50-92657da0a3df}">
+        <p14:section name="개념" id="{3941725d-253b-3d86-9715-1bf085b9087c}">
           <p14:sldIdLst>
             <p14:sldId id="258"/>
             <p14:sldId id="259"/>
             <p14:sldId id="260"/>
           </p14:sldIdLst>
         </p14:section>
-        <p14:section name="연습" id="{32c3d3dc-6a21-f41e-7e06-ed7bf2b1dbf6}">
+        <p14:section name="연습" id="{2bcbe6a8-365e-ce4e-6d95-a4c6548b0dc8}">
           <p14:sldIdLst>
             <p14:sldId id="261"/>
             <p14:sldId id="262"/>
@@ -141,19 +141,19 @@
             <p14:sldId id="264"/>
           </p14:sldIdLst>
         </p14:section>
-        <p14:section name="확인" id="{28502a49-a5fc-5f75-fc5c-8d9964fc67ff}">
+        <p14:section name="확인" id="{f1c33001-759e-ff90-0130-0a1133f49063}">
           <p14:sldIdLst>
             <p14:sldId id="265"/>
             <p14:sldId id="266"/>
             <p14:sldId id="267"/>
           </p14:sldIdLst>
         </p14:section>
-        <p14:section name="정리" id="{bf6ec34e-ed45-de9c-14a7-059b5f67d9c2}">
+        <p14:section name="정리" id="{36d55575-75a5-8780-5101-b23bd60999e8}">
           <p14:sldIdLst>
             <p14:sldId id="268"/>
           </p14:sldIdLst>
         </p14:section>
-        <p14:section name="보충" id="{f69f9b1b-5d9f-8e51-5532-a9c3044a57ed}">
+        <p14:section name="보충" id="{f42e6760-1624-88b1-926c-fdb127804c13}">
           <p14:sldIdLst>
             <p14:sldId id="269"/>
           </p14:sldIdLst>
@@ -3409,7 +3409,7 @@
         <p:spPr>
           <a:xfrm>
             <a:off x="1344168" y="2011680"/>
-            <a:ext cx="1965960" cy="1280160"/>
+            <a:ext cx="2606040" cy="1280160"/>
           </a:xfrm>
           <a:prstGeom prst="roundRect">
             <a:avLst>
@@ -3455,8 +3455,8 @@
         </p:nvSpPr>
         <p:spPr>
           <a:xfrm>
-            <a:off x="3584448" y="2011680"/>
-            <a:ext cx="1965960" cy="1280160"/>
+            <a:off x="4224528" y="2011680"/>
+            <a:ext cx="2606040" cy="1280160"/>
           </a:xfrm>
           <a:prstGeom prst="roundRect">
             <a:avLst>
@@ -3550,7 +3550,7 @@
         <p:spPr>
           <a:xfrm>
             <a:off x="1344168" y="3474720"/>
-            <a:ext cx="1965960" cy="1280160"/>
+            <a:ext cx="2606040" cy="1280160"/>
           </a:xfrm>
           <a:prstGeom prst="roundRect">
             <a:avLst>
@@ -3596,8 +3596,8 @@
         </p:nvSpPr>
         <p:spPr>
           <a:xfrm>
-            <a:off x="3584448" y="3474720"/>
-            <a:ext cx="1965960" cy="1280160"/>
+            <a:off x="4224528" y="3474720"/>
+            <a:ext cx="2606040" cy="1280160"/>
           </a:xfrm>
           <a:prstGeom prst="roundRect">
             <a:avLst>
@@ -6176,7 +6176,7 @@
         </p:nvSpPr>
         <p:spPr>
           <a:xfrm>
-            <a:off x="548640" y="2459736"/>
+            <a:off x="548640" y="2734056"/>
             <a:ext cx="566928" cy="566928"/>
           </a:xfrm>
           <a:prstGeom prst="roundRect">
@@ -6223,12 +6223,12 @@
         </p:nvSpPr>
         <p:spPr>
           <a:xfrm>
-            <a:off x="1344168" y="2109216"/>
-            <a:ext cx="1267968" cy="1267968"/>
+            <a:off x="1828800" y="2331720"/>
+            <a:ext cx="1371600" cy="1371600"/>
           </a:xfrm>
           <a:prstGeom prst="roundRect">
             <a:avLst>
-              <a:gd name="adj" fmla="val 10096"/>
+              <a:gd name="adj" fmla="val 9333"/>
             </a:avLst>
           </a:prstGeom>
           <a:solidFill>
@@ -6248,7 +6248,7 @@
               <a:buNone/>
             </a:pPr>
             <a:r>
-              <a:rPr lang="ko-KR" altLang="en-US" sz="5500" b="1" dirty="0">
+              <a:rPr lang="ko-KR" altLang="en-US" sz="5900" b="1" dirty="0">
                 <a:solidFill>
                   <a:srgbClr val="1F2937"/>
                 </a:solidFill>
@@ -6258,7 +6258,7 @@
               </a:rPr>
               <a:t>ㄴ</a:t>
             </a:r>
-            <a:endParaRPr lang="ko-KR" sz="5500" dirty="0"/>
+            <a:endParaRPr lang="ko-KR" sz="5900" dirty="0"/>
           </a:p>
         </p:txBody>
       </p:sp>
@@ -6270,12 +6270,12 @@
         </p:nvSpPr>
         <p:spPr>
           <a:xfrm>
-            <a:off x="2813304" y="2109216"/>
-            <a:ext cx="1267968" cy="1267968"/>
+            <a:off x="3401568" y="2331720"/>
+            <a:ext cx="1371600" cy="1371600"/>
           </a:xfrm>
           <a:prstGeom prst="roundRect">
             <a:avLst>
-              <a:gd name="adj" fmla="val 10096"/>
+              <a:gd name="adj" fmla="val 9333"/>
             </a:avLst>
           </a:prstGeom>
           <a:solidFill>
@@ -6295,7 +6295,7 @@
               <a:buNone/>
             </a:pPr>
             <a:r>
-              <a:rPr lang="ko-KR" altLang="en-US" sz="5500" b="1" dirty="0">
+              <a:rPr lang="ko-KR" altLang="en-US" sz="5900" b="1" dirty="0">
                 <a:solidFill>
                   <a:srgbClr val="1F2937"/>
                 </a:solidFill>
@@ -6305,7 +6305,7 @@
               </a:rPr>
               <a:t>ㅁ</a:t>
             </a:r>
-            <a:endParaRPr lang="ko-KR" sz="5500" dirty="0"/>
+            <a:endParaRPr lang="ko-KR" sz="5900" dirty="0"/>
           </a:p>
         </p:txBody>
       </p:sp>
@@ -6317,12 +6317,12 @@
         </p:nvSpPr>
         <p:spPr>
           <a:xfrm>
-            <a:off x="4282440" y="2109216"/>
-            <a:ext cx="1267968" cy="1267968"/>
+            <a:off x="4974336" y="2331720"/>
+            <a:ext cx="1371600" cy="1371600"/>
           </a:xfrm>
           <a:prstGeom prst="roundRect">
             <a:avLst>
-              <a:gd name="adj" fmla="val 10096"/>
+              <a:gd name="adj" fmla="val 9333"/>
             </a:avLst>
           </a:prstGeom>
           <a:solidFill>
@@ -6342,7 +6342,7 @@
               <a:buNone/>
             </a:pPr>
             <a:r>
-              <a:rPr lang="ko-KR" altLang="en-US" sz="5500" b="1" dirty="0">
+              <a:rPr lang="ko-KR" altLang="en-US" sz="5900" b="1" dirty="0">
                 <a:solidFill>
                   <a:srgbClr val="1F2937"/>
                 </a:solidFill>
@@ -6352,7 +6352,7 @@
               </a:rPr>
               <a:t>ㅅ</a:t>
             </a:r>
-            <a:endParaRPr lang="ko-KR" sz="5500" dirty="0"/>
+            <a:endParaRPr lang="ko-KR" sz="5900" dirty="0"/>
           </a:p>
         </p:txBody>
       </p:sp>
@@ -6364,7 +6364,7 @@
         </p:nvSpPr>
         <p:spPr>
           <a:xfrm>
-            <a:off x="548640" y="4654296"/>
+            <a:off x="548640" y="4928616"/>
             <a:ext cx="566928" cy="566928"/>
           </a:xfrm>
           <a:prstGeom prst="roundRect">
@@ -6411,12 +6411,12 @@
         </p:nvSpPr>
         <p:spPr>
           <a:xfrm>
-            <a:off x="1344168" y="4303776"/>
-            <a:ext cx="1267968" cy="1267968"/>
+            <a:off x="1828800" y="4526280"/>
+            <a:ext cx="1371600" cy="1371600"/>
           </a:xfrm>
           <a:prstGeom prst="roundRect">
             <a:avLst>
-              <a:gd name="adj" fmla="val 10096"/>
+              <a:gd name="adj" fmla="val 9333"/>
             </a:avLst>
           </a:prstGeom>
           <a:solidFill>
@@ -6436,7 +6436,7 @@
               <a:buNone/>
             </a:pPr>
             <a:r>
-              <a:rPr lang="ko-KR" altLang="en-US" sz="5500" b="1" dirty="0">
+              <a:rPr lang="ko-KR" altLang="en-US" sz="5900" b="1" dirty="0">
                 <a:solidFill>
                   <a:srgbClr val="1F2937"/>
                 </a:solidFill>
@@ -6446,7 +6446,7 @@
               </a:rPr>
               <a:t>ㅏ</a:t>
             </a:r>
-            <a:endParaRPr lang="ko-KR" sz="5500" dirty="0"/>
+            <a:endParaRPr lang="ko-KR" sz="5900" dirty="0"/>
           </a:p>
         </p:txBody>
       </p:sp>
@@ -6458,12 +6458,12 @@
         </p:nvSpPr>
         <p:spPr>
           <a:xfrm>
-            <a:off x="2813304" y="4303776"/>
-            <a:ext cx="1267968" cy="1267968"/>
+            <a:off x="3401568" y="4526280"/>
+            <a:ext cx="1371600" cy="1371600"/>
           </a:xfrm>
           <a:prstGeom prst="roundRect">
             <a:avLst>
-              <a:gd name="adj" fmla="val 10096"/>
+              <a:gd name="adj" fmla="val 9333"/>
             </a:avLst>
           </a:prstGeom>
           <a:solidFill>
@@ -6483,7 +6483,7 @@
               <a:buNone/>
             </a:pPr>
             <a:r>
-              <a:rPr lang="ko-KR" altLang="en-US" sz="5500" b="1" dirty="0">
+              <a:rPr lang="ko-KR" altLang="en-US" sz="5900" b="1" dirty="0">
                 <a:solidFill>
                   <a:srgbClr val="1F2937"/>
                 </a:solidFill>
@@ -6493,7 +6493,7 @@
               </a:rPr>
               <a:t>ㅗ</a:t>
             </a:r>
-            <a:endParaRPr lang="ko-KR" sz="5500" dirty="0"/>
+            <a:endParaRPr lang="ko-KR" sz="5900" dirty="0"/>
           </a:p>
         </p:txBody>
       </p:sp>
@@ -6505,12 +6505,12 @@
         </p:nvSpPr>
         <p:spPr>
           <a:xfrm>
-            <a:off x="4282440" y="4303776"/>
-            <a:ext cx="1267968" cy="1267968"/>
+            <a:off x="4974336" y="4526280"/>
+            <a:ext cx="1371600" cy="1371600"/>
           </a:xfrm>
           <a:prstGeom prst="roundRect">
             <a:avLst>
-              <a:gd name="adj" fmla="val 10096"/>
+              <a:gd name="adj" fmla="val 9333"/>
             </a:avLst>
           </a:prstGeom>
           <a:solidFill>
@@ -6530,7 +6530,7 @@
               <a:buNone/>
             </a:pPr>
             <a:r>
-              <a:rPr lang="ko-KR" altLang="en-US" sz="5500" b="1" dirty="0">
+              <a:rPr lang="ko-KR" altLang="en-US" sz="5900" b="1" dirty="0">
                 <a:solidFill>
                   <a:srgbClr val="1F2937"/>
                 </a:solidFill>
@@ -6540,7 +6540,7 @@
               </a:rPr>
               <a:t>ㅣ</a:t>
             </a:r>
-            <a:endParaRPr lang="ko-KR" sz="5500" dirty="0"/>
+            <a:endParaRPr lang="ko-KR" sz="5900" dirty="0"/>
           </a:p>
         </p:txBody>
       </p:sp>
@@ -8289,7 +8289,7 @@
                         <a:buNone/>
                       </a:pPr>
                       <a:r>
-                        <a:rPr lang="en-US" sz="3200" b="1" dirty="0">
+                        <a:rPr lang="en-US" sz="4500" b="1" dirty="0">
                           <a:solidFill>
                             <a:srgbClr val="1F2937"/>
                           </a:solidFill>
@@ -8299,7 +8299,7 @@
                         </a:rPr>
                         <a:t>ㅏ</a:t>
                       </a:r>
-                      <a:endParaRPr lang="en-US" sz="3200" dirty="0">
+                      <a:endParaRPr lang="en-US" sz="4500" dirty="0">
                         <a:latin typeface="맑은 고딕" charset="0"/>
                         <a:ea typeface="맑은 고딕" charset="0"/>
                         <a:cs typeface="맑은 고딕" charset="0"/>
@@ -8357,7 +8357,7 @@
                         <a:buNone/>
                       </a:pPr>
                       <a:r>
-                        <a:rPr lang="en-US" sz="3200" b="1" dirty="0">
+                        <a:rPr lang="en-US" sz="4500" b="1" dirty="0">
                           <a:solidFill>
                             <a:srgbClr val="1F2937"/>
                           </a:solidFill>
@@ -8367,7 +8367,7 @@
                         </a:rPr>
                         <a:t>ㅓ</a:t>
                       </a:r>
-                      <a:endParaRPr lang="en-US" sz="3200" dirty="0">
+                      <a:endParaRPr lang="en-US" sz="4500" dirty="0">
                         <a:latin typeface="맑은 고딕" charset="0"/>
                         <a:ea typeface="맑은 고딕" charset="0"/>
                         <a:cs typeface="맑은 고딕" charset="0"/>
@@ -8425,7 +8425,7 @@
                         <a:buNone/>
                       </a:pPr>
                       <a:r>
-                        <a:rPr lang="en-US" sz="3200" b="1" dirty="0">
+                        <a:rPr lang="en-US" sz="4500" b="1" dirty="0">
                           <a:solidFill>
                             <a:srgbClr val="1F2937"/>
                           </a:solidFill>
@@ -8435,7 +8435,7 @@
                         </a:rPr>
                         <a:t>ㅗ</a:t>
                       </a:r>
-                      <a:endParaRPr lang="en-US" sz="3200" dirty="0">
+                      <a:endParaRPr lang="en-US" sz="4500" dirty="0">
                         <a:latin typeface="맑은 고딕" charset="0"/>
                         <a:ea typeface="맑은 고딕" charset="0"/>
                         <a:cs typeface="맑은 고딕" charset="0"/>
@@ -8493,7 +8493,7 @@
                         <a:buNone/>
                       </a:pPr>
                       <a:r>
-                        <a:rPr lang="en-US" sz="3200" b="1" dirty="0">
+                        <a:rPr lang="en-US" sz="4500" b="1" dirty="0">
                           <a:solidFill>
                             <a:srgbClr val="1F2937"/>
                           </a:solidFill>
@@ -8503,7 +8503,7 @@
                         </a:rPr>
                         <a:t>ㅜ</a:t>
                       </a:r>
-                      <a:endParaRPr lang="en-US" sz="3200" dirty="0">
+                      <a:endParaRPr lang="en-US" sz="4500" dirty="0">
                         <a:latin typeface="맑은 고딕" charset="0"/>
                         <a:ea typeface="맑은 고딕" charset="0"/>
                         <a:cs typeface="맑은 고딕" charset="0"/>
@@ -8561,7 +8561,7 @@
                         <a:buNone/>
                       </a:pPr>
                       <a:r>
-                        <a:rPr lang="en-US" sz="3200" b="1" dirty="0">
+                        <a:rPr lang="en-US" sz="4500" b="1" dirty="0">
                           <a:solidFill>
                             <a:srgbClr val="1F2937"/>
                           </a:solidFill>
@@ -8571,7 +8571,7 @@
                         </a:rPr>
                         <a:t>ㅣ</a:t>
                       </a:r>
-                      <a:endParaRPr lang="en-US" sz="3200" dirty="0">
+                      <a:endParaRPr lang="en-US" sz="4500" dirty="0">
                         <a:latin typeface="맑은 고딕" charset="0"/>
                         <a:ea typeface="맑은 고딕" charset="0"/>
                         <a:cs typeface="맑은 고딕" charset="0"/>
@@ -8631,7 +8631,7 @@
                         <a:buNone/>
                       </a:pPr>
                       <a:r>
-                        <a:rPr lang="en-US" sz="3200" b="1" dirty="0">
+                        <a:rPr lang="en-US" sz="4500" b="1" dirty="0">
                           <a:solidFill>
                             <a:srgbClr val="1F2937"/>
                           </a:solidFill>
@@ -8641,7 +8641,7 @@
                         </a:rPr>
                         <a:t>ㄱ</a:t>
                       </a:r>
-                      <a:endParaRPr lang="en-US" sz="3200" dirty="0">
+                      <a:endParaRPr lang="en-US" sz="4500" dirty="0">
                         <a:latin typeface="맑은 고딕" charset="0"/>
                         <a:ea typeface="맑은 고딕" charset="0"/>
                         <a:cs typeface="맑은 고딕" charset="0"/>
@@ -9041,7 +9041,7 @@
                         <a:buNone/>
                       </a:pPr>
                       <a:r>
-                        <a:rPr lang="en-US" sz="3200" b="1" dirty="0">
+                        <a:rPr lang="en-US" sz="4500" b="1" dirty="0">
                           <a:solidFill>
                             <a:srgbClr val="1F2937"/>
                           </a:solidFill>
@@ -9051,7 +9051,7 @@
                         </a:rPr>
                         <a:t>ㄴ</a:t>
                       </a:r>
-                      <a:endParaRPr lang="en-US" sz="3200" dirty="0">
+                      <a:endParaRPr lang="en-US" sz="4500" dirty="0">
                         <a:latin typeface="맑은 고딕" charset="0"/>
                         <a:ea typeface="맑은 고딕" charset="0"/>
                         <a:cs typeface="맑은 고딕" charset="0"/>
@@ -9451,7 +9451,7 @@
                         <a:buNone/>
                       </a:pPr>
                       <a:r>
-                        <a:rPr lang="en-US" sz="3200" b="1" dirty="0">
+                        <a:rPr lang="en-US" sz="4500" b="1" dirty="0">
                           <a:solidFill>
                             <a:srgbClr val="1F2937"/>
                           </a:solidFill>
@@ -9461,7 +9461,7 @@
                         </a:rPr>
                         <a:t>ㄷ</a:t>
                       </a:r>
-                      <a:endParaRPr lang="en-US" sz="3200" dirty="0">
+                      <a:endParaRPr lang="en-US" sz="4500" dirty="0">
                         <a:latin typeface="맑은 고딕" charset="0"/>
                         <a:ea typeface="맑은 고딕" charset="0"/>
                         <a:cs typeface="맑은 고딕" charset="0"/>
@@ -9861,7 +9861,7 @@
                         <a:buNone/>
                       </a:pPr>
                       <a:r>
-                        <a:rPr lang="en-US" sz="3200" b="1" dirty="0">
+                        <a:rPr lang="en-US" sz="4500" b="1" dirty="0">
                           <a:solidFill>
                             <a:srgbClr val="1F2937"/>
                           </a:solidFill>
@@ -9871,7 +9871,7 @@
                         </a:rPr>
                         <a:t>ㄹ</a:t>
                       </a:r>
-                      <a:endParaRPr lang="en-US" sz="3200" dirty="0">
+                      <a:endParaRPr lang="en-US" sz="4500" dirty="0">
                         <a:latin typeface="맑은 고딕" charset="0"/>
                         <a:ea typeface="맑은 고딕" charset="0"/>
                         <a:cs typeface="맑은 고딕" charset="0"/>
@@ -10271,7 +10271,7 @@
                         <a:buNone/>
                       </a:pPr>
                       <a:r>
-                        <a:rPr lang="en-US" sz="3200" b="1" dirty="0">
+                        <a:rPr lang="en-US" sz="4500" b="1" dirty="0">
                           <a:solidFill>
                             <a:srgbClr val="1F2937"/>
                           </a:solidFill>
@@ -10281,7 +10281,7 @@
                         </a:rPr>
                         <a:t>ㅁ</a:t>
                       </a:r>
-                      <a:endParaRPr lang="en-US" sz="3200" dirty="0">
+                      <a:endParaRPr lang="en-US" sz="4500" dirty="0">
                         <a:latin typeface="맑은 고딕" charset="0"/>
                         <a:ea typeface="맑은 고딕" charset="0"/>
                         <a:cs typeface="맑은 고딕" charset="0"/>
@@ -11360,7 +11360,7 @@
                         <a:buNone/>
                       </a:pPr>
                       <a:r>
-                        <a:rPr lang="en-US" sz="3200" b="1" dirty="0">
+                        <a:rPr lang="en-US" sz="4500" b="1" dirty="0">
                           <a:solidFill>
                             <a:srgbClr val="1F2937"/>
                           </a:solidFill>
@@ -11370,7 +11370,7 @@
                         </a:rPr>
                         <a:t>ㅏ</a:t>
                       </a:r>
-                      <a:endParaRPr lang="en-US" sz="3200" dirty="0">
+                      <a:endParaRPr lang="en-US" sz="4500" dirty="0">
                         <a:latin typeface="맑은 고딕" charset="0"/>
                         <a:ea typeface="맑은 고딕" charset="0"/>
                         <a:cs typeface="맑은 고딕" charset="0"/>
@@ -11428,7 +11428,7 @@
                         <a:buNone/>
                       </a:pPr>
                       <a:r>
-                        <a:rPr lang="en-US" sz="3200" b="1" dirty="0">
+                        <a:rPr lang="en-US" sz="4500" b="1" dirty="0">
                           <a:solidFill>
                             <a:srgbClr val="1F2937"/>
                           </a:solidFill>
@@ -11438,7 +11438,7 @@
                         </a:rPr>
                         <a:t>ㅓ</a:t>
                       </a:r>
-                      <a:endParaRPr lang="en-US" sz="3200" dirty="0">
+                      <a:endParaRPr lang="en-US" sz="4500" dirty="0">
                         <a:latin typeface="맑은 고딕" charset="0"/>
                         <a:ea typeface="맑은 고딕" charset="0"/>
                         <a:cs typeface="맑은 고딕" charset="0"/>
@@ -11496,7 +11496,7 @@
                         <a:buNone/>
                       </a:pPr>
                       <a:r>
-                        <a:rPr lang="en-US" sz="3200" b="1" dirty="0">
+                        <a:rPr lang="en-US" sz="4500" b="1" dirty="0">
                           <a:solidFill>
                             <a:srgbClr val="1F2937"/>
                           </a:solidFill>
@@ -11506,7 +11506,7 @@
                         </a:rPr>
                         <a:t>ㅗ</a:t>
                       </a:r>
-                      <a:endParaRPr lang="en-US" sz="3200" dirty="0">
+                      <a:endParaRPr lang="en-US" sz="4500" dirty="0">
                         <a:latin typeface="맑은 고딕" charset="0"/>
                         <a:ea typeface="맑은 고딕" charset="0"/>
                         <a:cs typeface="맑은 고딕" charset="0"/>
@@ -11564,7 +11564,7 @@
                         <a:buNone/>
                       </a:pPr>
                       <a:r>
-                        <a:rPr lang="en-US" sz="3200" b="1" dirty="0">
+                        <a:rPr lang="en-US" sz="4500" b="1" dirty="0">
                           <a:solidFill>
                             <a:srgbClr val="1F2937"/>
                           </a:solidFill>
@@ -11574,7 +11574,7 @@
                         </a:rPr>
                         <a:t>ㅜ</a:t>
                       </a:r>
-                      <a:endParaRPr lang="en-US" sz="3200" dirty="0">
+                      <a:endParaRPr lang="en-US" sz="4500" dirty="0">
                         <a:latin typeface="맑은 고딕" charset="0"/>
                         <a:ea typeface="맑은 고딕" charset="0"/>
                         <a:cs typeface="맑은 고딕" charset="0"/>
@@ -11632,7 +11632,7 @@
                         <a:buNone/>
                       </a:pPr>
                       <a:r>
-                        <a:rPr lang="en-US" sz="3200" b="1" dirty="0">
+                        <a:rPr lang="en-US" sz="4500" b="1" dirty="0">
                           <a:solidFill>
                             <a:srgbClr val="1F2937"/>
                           </a:solidFill>
@@ -11642,7 +11642,7 @@
                         </a:rPr>
                         <a:t>ㅣ</a:t>
                       </a:r>
-                      <a:endParaRPr lang="en-US" sz="3200" dirty="0">
+                      <a:endParaRPr lang="en-US" sz="4500" dirty="0">
                         <a:latin typeface="맑은 고딕" charset="0"/>
                         <a:ea typeface="맑은 고딕" charset="0"/>
                         <a:cs typeface="맑은 고딕" charset="0"/>
@@ -11702,7 +11702,7 @@
                         <a:buNone/>
                       </a:pPr>
                       <a:r>
-                        <a:rPr lang="en-US" sz="3200" b="1" dirty="0">
+                        <a:rPr lang="en-US" sz="4500" b="1" dirty="0">
                           <a:solidFill>
                             <a:srgbClr val="1F2937"/>
                           </a:solidFill>
@@ -11712,7 +11712,7 @@
                         </a:rPr>
                         <a:t>ㅂ</a:t>
                       </a:r>
-                      <a:endParaRPr lang="en-US" sz="3200" dirty="0">
+                      <a:endParaRPr lang="en-US" sz="4500" dirty="0">
                         <a:latin typeface="맑은 고딕" charset="0"/>
                         <a:ea typeface="맑은 고딕" charset="0"/>
                         <a:cs typeface="맑은 고딕" charset="0"/>
@@ -12112,7 +12112,7 @@
                         <a:buNone/>
                       </a:pPr>
                       <a:r>
-                        <a:rPr lang="en-US" sz="3200" b="1" dirty="0">
+                        <a:rPr lang="en-US" sz="4500" b="1" dirty="0">
                           <a:solidFill>
                             <a:srgbClr val="1F2937"/>
                           </a:solidFill>
@@ -12122,7 +12122,7 @@
                         </a:rPr>
                         <a:t>ㅅ</a:t>
                       </a:r>
-                      <a:endParaRPr lang="en-US" sz="3200" dirty="0">
+                      <a:endParaRPr lang="en-US" sz="4500" dirty="0">
                         <a:latin typeface="맑은 고딕" charset="0"/>
                         <a:ea typeface="맑은 고딕" charset="0"/>
                         <a:cs typeface="맑은 고딕" charset="0"/>
@@ -12522,7 +12522,7 @@
                         <a:buNone/>
                       </a:pPr>
                       <a:r>
-                        <a:rPr lang="en-US" sz="3200" b="1" dirty="0">
+                        <a:rPr lang="en-US" sz="4500" b="1" dirty="0">
                           <a:solidFill>
                             <a:srgbClr val="1F2937"/>
                           </a:solidFill>
@@ -12532,7 +12532,7 @@
                         </a:rPr>
                         <a:t>ㅇ</a:t>
                       </a:r>
-                      <a:endParaRPr lang="en-US" sz="3200" dirty="0">
+                      <a:endParaRPr lang="en-US" sz="4500" dirty="0">
                         <a:latin typeface="맑은 고딕" charset="0"/>
                         <a:ea typeface="맑은 고딕" charset="0"/>
                         <a:cs typeface="맑은 고딕" charset="0"/>
@@ -12932,7 +12932,7 @@
                         <a:buNone/>
                       </a:pPr>
                       <a:r>
-                        <a:rPr lang="en-US" sz="3200" b="1" dirty="0">
+                        <a:rPr lang="en-US" sz="4500" b="1" dirty="0">
                           <a:solidFill>
                             <a:srgbClr val="1F2937"/>
                           </a:solidFill>
@@ -12942,7 +12942,7 @@
                         </a:rPr>
                         <a:t>ㅈ</a:t>
                       </a:r>
-                      <a:endParaRPr lang="en-US" sz="3200" dirty="0">
+                      <a:endParaRPr lang="en-US" sz="4500" dirty="0">
                         <a:latin typeface="맑은 고딕" charset="0"/>
                         <a:ea typeface="맑은 고딕" charset="0"/>
                         <a:cs typeface="맑은 고딕" charset="0"/>
@@ -13342,7 +13342,7 @@
                         <a:buNone/>
                       </a:pPr>
                       <a:r>
-                        <a:rPr lang="en-US" sz="3200" b="1" dirty="0">
+                        <a:rPr lang="en-US" sz="4500" b="1" dirty="0">
                           <a:solidFill>
                             <a:srgbClr val="1F2937"/>
                           </a:solidFill>
@@ -13352,7 +13352,7 @@
                         </a:rPr>
                         <a:t>ㅎ</a:t>
                       </a:r>
-                      <a:endParaRPr lang="en-US" sz="3200" dirty="0">
+                      <a:endParaRPr lang="en-US" sz="4500" dirty="0">
                         <a:latin typeface="맑은 고딕" charset="0"/>
                         <a:ea typeface="맑은 고딕" charset="0"/>
                         <a:cs typeface="맑은 고딕" charset="0"/>

--- a/dist/초1/국어/한글/초1_국어_한글_03_받침없는글자.pptx
+++ b/dist/초1/국어/한글/초1_국어_한글_03_받침없는글자.pptx
@@ -120,20 +120,20 @@
   <p:extLst>
     <p:ext uri="{521415D9-36F7-43E2-AB2F-B90AF26B5E84}">
       <p14:sectionLst xmlns:p14="http://schemas.microsoft.com/office/powerpoint/2010/main">
-        <p14:section name="도입" id="{9a4fd3fb-f714-6ea6-a29a-669aba204fc0}">
+        <p14:section name="도입" id="{86211748-dc7f-8ca0-df0b-7c1a32df8469}">
           <p14:sldIdLst>
             <p14:sldId id="256"/>
             <p14:sldId id="257"/>
           </p14:sldIdLst>
         </p14:section>
-        <p14:section name="개념" id="{3941725d-253b-3d86-9715-1bf085b9087c}">
+        <p14:section name="개념" id="{d7bcc552-ce3a-fb71-b305-a429e593e406}">
           <p14:sldIdLst>
             <p14:sldId id="258"/>
             <p14:sldId id="259"/>
             <p14:sldId id="260"/>
           </p14:sldIdLst>
         </p14:section>
-        <p14:section name="연습" id="{2bcbe6a8-365e-ce4e-6d95-a4c6548b0dc8}">
+        <p14:section name="연습" id="{eb1affdc-efd1-ae4e-6d48-70bf3e6543fb}">
           <p14:sldIdLst>
             <p14:sldId id="261"/>
             <p14:sldId id="262"/>
@@ -141,19 +141,19 @@
             <p14:sldId id="264"/>
           </p14:sldIdLst>
         </p14:section>
-        <p14:section name="확인" id="{f1c33001-759e-ff90-0130-0a1133f49063}">
+        <p14:section name="확인" id="{d655da8f-9e77-987a-05b5-de8b27a68192}">
           <p14:sldIdLst>
             <p14:sldId id="265"/>
             <p14:sldId id="266"/>
             <p14:sldId id="267"/>
           </p14:sldIdLst>
         </p14:section>
-        <p14:section name="정리" id="{36d55575-75a5-8780-5101-b23bd60999e8}">
+        <p14:section name="정리" id="{ef2425eb-b5c9-058a-c890-bfd868df37f4}">
           <p14:sldIdLst>
             <p14:sldId id="268"/>
           </p14:sldIdLst>
         </p14:section>
-        <p14:section name="보충" id="{f42e6760-1624-88b1-926c-fdb127804c13}">
+        <p14:section name="보충" id="{b308c8be-aa49-0da7-2a9a-4647b57d1df5}">
           <p14:sldIdLst>
             <p14:sldId id="269"/>
           </p14:sldIdLst>
@@ -8207,7 +8207,7 @@
           </p:nvPr>
         </p:nvGraphicFramePr>
         <p:xfrm>
-          <a:off x="1156716" y="2164080"/>
+          <a:off x="1156716" y="2225040"/>
           <a:ext cx="9875520" cy="914400"/>
         </p:xfrm>
         <a:graphic>
@@ -8222,7 +8222,7 @@
                 <a:gridCol w="1645920"/>
                 <a:gridCol w="1645920"/>
               </a:tblGrid>
-              <a:tr h="650240">
+              <a:tr h="629920">
                 <a:tc>
                   <a:txBody>
                     <a:bodyPr/>
@@ -8621,7 +8621,7 @@
                   </a:tcPr>
                 </a:tc>
               </a:tr>
-              <a:tr h="650240">
+              <a:tr h="629920">
                 <a:tc>
                   <a:txBody>
                     <a:bodyPr/>
@@ -9031,7 +9031,7 @@
                   </a:tcPr>
                 </a:tc>
               </a:tr>
-              <a:tr h="650240">
+              <a:tr h="629920">
                 <a:tc>
                   <a:txBody>
                     <a:bodyPr/>
@@ -9441,7 +9441,7 @@
                   </a:tcPr>
                 </a:tc>
               </a:tr>
-              <a:tr h="650240">
+              <a:tr h="629920">
                 <a:tc>
                   <a:txBody>
                     <a:bodyPr/>
@@ -9851,7 +9851,7 @@
                   </a:tcPr>
                 </a:tc>
               </a:tr>
-              <a:tr h="650240">
+              <a:tr h="629920">
                 <a:tc>
                   <a:txBody>
                     <a:bodyPr/>
@@ -10261,7 +10261,7 @@
                   </a:tcPr>
                 </a:tc>
               </a:tr>
-              <a:tr h="650240">
+              <a:tr h="629920">
                 <a:tc>
                   <a:txBody>
                     <a:bodyPr/>
@@ -11278,7 +11278,7 @@
           </p:nvPr>
         </p:nvGraphicFramePr>
         <p:xfrm>
-          <a:off x="1156716" y="2164080"/>
+          <a:off x="1156716" y="2225040"/>
           <a:ext cx="9875520" cy="914400"/>
         </p:xfrm>
         <a:graphic>
@@ -11293,7 +11293,7 @@
                 <a:gridCol w="1645920"/>
                 <a:gridCol w="1645920"/>
               </a:tblGrid>
-              <a:tr h="650240">
+              <a:tr h="629920">
                 <a:tc>
                   <a:txBody>
                     <a:bodyPr/>
@@ -11692,7 +11692,7 @@
                   </a:tcPr>
                 </a:tc>
               </a:tr>
-              <a:tr h="650240">
+              <a:tr h="629920">
                 <a:tc>
                   <a:txBody>
                     <a:bodyPr/>
@@ -12102,7 +12102,7 @@
                   </a:tcPr>
                 </a:tc>
               </a:tr>
-              <a:tr h="650240">
+              <a:tr h="629920">
                 <a:tc>
                   <a:txBody>
                     <a:bodyPr/>
@@ -12512,7 +12512,7 @@
                   </a:tcPr>
                 </a:tc>
               </a:tr>
-              <a:tr h="650240">
+              <a:tr h="629920">
                 <a:tc>
                   <a:txBody>
                     <a:bodyPr/>
@@ -12922,7 +12922,7 @@
                   </a:tcPr>
                 </a:tc>
               </a:tr>
-              <a:tr h="650240">
+              <a:tr h="629920">
                 <a:tc>
                   <a:txBody>
                     <a:bodyPr/>
@@ -13332,7 +13332,7 @@
                   </a:tcPr>
                 </a:tc>
               </a:tr>
-              <a:tr h="650240">
+              <a:tr h="629920">
                 <a:tc>
                   <a:txBody>
                     <a:bodyPr/>
